--- a/lectures/b07/ppt/b07-l02.pptx
+++ b/lectures/b07/ppt/b07-l02.pptx
@@ -4383,7 +4383,7 @@
                           <a:ea typeface="Malgun Gothic"/>
                           <a:cs typeface="Malgun Gothic"/>
                         </a:rPr>
-                        <a:t>후시냅스 니코틴성 ACh 수용체(또는 MuSK) 자가항체 → 안전 계수 감소 (B08 L09)</a:t>
+                        <a:t>후시냅스 니코틴성 ACh 수용체(또는 MuSK) 자가항체 → 안전 계수 감소 (B08 L05)</a:t>
                       </a:r>
                     </a:p>
                   </a:txBody>
